--- a/MSE803 - Data Analytics/Messy Data Analysis/Messy Dataset Analysis Slideshow.pptx
+++ b/MSE803 - Data Analytics/Messy Data Analysis/Messy Dataset Analysis Slideshow.pptx
@@ -2996,175 +2996,6 @@
           </a:p>
         </p:txBody>
       </p:sp>
-      <p:sp>
-        <p:nvSpPr>
-          <p:cNvPr id="30" name="Shape 28"/>
-          <p:cNvSpPr/>
-          <p:nvPr/>
-        </p:nvSpPr>
-        <p:spPr>
-          <a:xfrm>
-            <a:off x="4754880" y="3657600"/>
-            <a:ext cx="4160520" cy="1078992"/>
-          </a:xfrm>
-          <a:prstGeom prst="rect">
-            <a:avLst/>
-          </a:prstGeom>
-          <a:solidFill>
-            <a:srgbClr val="065A82">
-              <a:alpha val="60000"/>
-            </a:srgbClr>
-          </a:solidFill>
-          <a:ln w="12700">
-            <a:solidFill>
-              <a:srgbClr val="1C7293"/>
-            </a:solidFill>
-            <a:prstDash val="solid"/>
-          </a:ln>
-        </p:spPr>
-      </p:sp>
-      <p:sp>
-        <p:nvSpPr>
-          <p:cNvPr id="31" name="Shape 29"/>
-          <p:cNvSpPr/>
-          <p:nvPr/>
-        </p:nvSpPr>
-        <p:spPr>
-          <a:xfrm>
-            <a:off x="4846320" y="4005072"/>
-            <a:ext cx="347472" cy="347472"/>
-          </a:xfrm>
-          <a:prstGeom prst="ellipse">
-            <a:avLst/>
-          </a:prstGeom>
-          <a:solidFill>
-            <a:srgbClr val="1C7293"/>
-          </a:solidFill>
-          <a:ln w="12700">
-            <a:solidFill>
-              <a:srgbClr val="1C7293"/>
-            </a:solidFill>
-            <a:prstDash val="solid"/>
-          </a:ln>
-        </p:spPr>
-      </p:sp>
-      <p:sp>
-        <p:nvSpPr>
-          <p:cNvPr id="32" name="Text 30"/>
-          <p:cNvSpPr/>
-          <p:nvPr/>
-        </p:nvSpPr>
-        <p:spPr>
-          <a:xfrm>
-            <a:off x="4846320" y="4005072"/>
-            <a:ext cx="347472" cy="347472"/>
-          </a:xfrm>
-          <a:prstGeom prst="rect">
-            <a:avLst/>
-          </a:prstGeom>
-          <a:noFill/>
-          <a:ln/>
-        </p:spPr>
-        <p:txBody>
-          <a:bodyPr wrap="square" lIns="0" tIns="0" rIns="0" bIns="0" rtlCol="0" anchor="ctr"/>
-          <a:lstStyle/>
-          <a:p>
-            <a:pPr marL="0" indent="0" algn="ctr">
-              <a:buNone/>
-            </a:pPr>
-            <a:r>
-              <a:rPr lang="en-US" sz="1100" b="1" dirty="0">
-                <a:solidFill>
-                  <a:srgbClr val="FFFFFF"/>
-                </a:solidFill>
-                <a:latin typeface="Calibri" pitchFamily="34" charset="0"/>
-                <a:ea typeface="Calibri" pitchFamily="34" charset="-122"/>
-                <a:cs typeface="Calibri" pitchFamily="34" charset="-120"/>
-              </a:rPr>
-              <a:t>6</a:t>
-            </a:r>
-            <a:endParaRPr lang="en-US" sz="1100" dirty="0"/>
-          </a:p>
-        </p:txBody>
-      </p:sp>
-      <p:sp>
-        <p:nvSpPr>
-          <p:cNvPr id="33" name="Text 31"/>
-          <p:cNvSpPr/>
-          <p:nvPr/>
-        </p:nvSpPr>
-        <p:spPr>
-          <a:xfrm>
-            <a:off x="5285232" y="3730752"/>
-            <a:ext cx="3520440" cy="274320"/>
-          </a:xfrm>
-          <a:prstGeom prst="rect">
-            <a:avLst/>
-          </a:prstGeom>
-          <a:noFill/>
-          <a:ln/>
-        </p:spPr>
-        <p:txBody>
-          <a:bodyPr wrap="square" lIns="0" tIns="0" rIns="0" bIns="0" rtlCol="0" anchor="ctr"/>
-          <a:lstStyle/>
-          <a:p>
-            <a:pPr marL="0" indent="0">
-              <a:buNone/>
-            </a:pPr>
-            <a:r>
-              <a:rPr lang="en-US" sz="1200" b="1" dirty="0">
-                <a:solidFill>
-                  <a:srgbClr val="D6EAF8"/>
-                </a:solidFill>
-                <a:latin typeface="Calibri" pitchFamily="34" charset="0"/>
-                <a:ea typeface="Calibri" pitchFamily="34" charset="-122"/>
-                <a:cs typeface="Calibri" pitchFamily="34" charset="-120"/>
-              </a:rPr>
-              <a:t>Join Year ≠ Salary</a:t>
-            </a:r>
-            <a:endParaRPr lang="en-US" sz="1200" dirty="0"/>
-          </a:p>
-        </p:txBody>
-      </p:sp>
-      <p:sp>
-        <p:nvSpPr>
-          <p:cNvPr id="34" name="Text 32"/>
-          <p:cNvSpPr/>
-          <p:nvPr/>
-        </p:nvSpPr>
-        <p:spPr>
-          <a:xfrm>
-            <a:off x="5285232" y="4041648"/>
-            <a:ext cx="3520440" cy="621792"/>
-          </a:xfrm>
-          <a:prstGeom prst="rect">
-            <a:avLst/>
-          </a:prstGeom>
-          <a:noFill/>
-          <a:ln/>
-        </p:spPr>
-        <p:txBody>
-          <a:bodyPr wrap="square" lIns="0" tIns="0" rIns="0" bIns="0" rtlCol="0" anchor="ctr"/>
-          <a:lstStyle/>
-          <a:p>
-            <a:pPr marL="0" indent="0">
-              <a:buNone/>
-            </a:pPr>
-            <a:r>
-              <a:rPr lang="en-US" sz="950" dirty="0">
-                <a:solidFill>
-                  <a:srgbClr val="94A3B8"/>
-                </a:solidFill>
-                <a:latin typeface="Calibri" pitchFamily="34" charset="0"/>
-                <a:ea typeface="Calibri" pitchFamily="34" charset="-122"/>
-                <a:cs typeface="Calibri" pitchFamily="34" charset="-120"/>
-              </a:rPr>
-              <a:t>When someone joined has no influence on their pay (r=−0.03). Compensation is based on other factors like age/experience.</a:t>
-            </a:r>
-            <a:endParaRPr lang="en-US" sz="950" dirty="0"/>
-          </a:p>
-        </p:txBody>
-      </p:sp>
     </p:spTree>
   </p:cSld>
   <p:clrMapOvr>
@@ -12785,9 +12616,322 @@
           </a:p>
         </p:txBody>
       </p:sp>
+      <p:sp>
+        <p:nvSpPr>
+          <p:cNvPr id="6" name="Text 3"/>
+          <p:cNvSpPr/>
+          <p:nvPr/>
+        </p:nvSpPr>
+        <p:spPr>
+          <a:xfrm>
+            <a:off x="5532120" y="1532325"/>
+            <a:ext cx="3383280" cy="320040"/>
+          </a:xfrm>
+          <a:prstGeom prst="rect">
+            <a:avLst/>
+          </a:prstGeom>
+          <a:noFill/>
+          <a:ln/>
+        </p:spPr>
+        <p:txBody>
+          <a:bodyPr wrap="square" lIns="0" tIns="0" rIns="0" bIns="0" rtlCol="0" anchor="ctr"/>
+          <a:lstStyle/>
+          <a:p>
+            <a:pPr marL="0" indent="0">
+              <a:buNone/>
+            </a:pPr>
+            <a:r>
+              <a:rPr lang="en-US" sz="1200" b="1" dirty="0">
+                <a:solidFill>
+                  <a:srgbClr val="065A82"/>
+                </a:solidFill>
+                <a:latin typeface="Calibri" pitchFamily="34" charset="0"/>
+                <a:ea typeface="Calibri" pitchFamily="34" charset="-122"/>
+                <a:cs typeface="Calibri" pitchFamily="34" charset="-120"/>
+              </a:rPr>
+              <a:t>How to Read This Chart</a:t>
+            </a:r>
+            <a:endParaRPr lang="en-US" sz="1200" dirty="0"/>
+          </a:p>
+        </p:txBody>
+      </p:sp>
+      <p:sp>
+        <p:nvSpPr>
+          <p:cNvPr id="7" name="Shape 4"/>
+          <p:cNvSpPr/>
+          <p:nvPr/>
+        </p:nvSpPr>
+        <p:spPr>
+          <a:xfrm>
+            <a:off x="5532120" y="1994097"/>
+            <a:ext cx="3383280" cy="1143000"/>
+          </a:xfrm>
+          <a:prstGeom prst="rect">
+            <a:avLst/>
+          </a:prstGeom>
+          <a:solidFill>
+            <a:srgbClr val="F0F7FF"/>
+          </a:solidFill>
+          <a:ln w="12700">
+            <a:solidFill>
+              <a:srgbClr val="D6EAF8"/>
+            </a:solidFill>
+            <a:prstDash val="solid"/>
+          </a:ln>
+          <a:effectLst>
+            <a:outerShdw blurRad="101600" dist="38100" dir="8100000" algn="bl" rotWithShape="0">
+              <a:srgbClr val="000000">
+                <a:alpha val="10000"/>
+              </a:srgbClr>
+            </a:outerShdw>
+          </a:effectLst>
+        </p:spPr>
+      </p:sp>
+      <p:sp>
+        <p:nvSpPr>
+          <p:cNvPr id="8" name="Text 5"/>
+          <p:cNvSpPr/>
+          <p:nvPr/>
+        </p:nvSpPr>
+        <p:spPr>
+          <a:xfrm>
+            <a:off x="5623560" y="2058105"/>
+            <a:ext cx="3200400" cy="1024128"/>
+          </a:xfrm>
+          <a:prstGeom prst="rect">
+            <a:avLst/>
+          </a:prstGeom>
+          <a:noFill/>
+          <a:ln/>
+        </p:spPr>
+        <p:txBody>
+          <a:bodyPr wrap="square" lIns="0" tIns="0" rIns="0" bIns="0" rtlCol="0" anchor="ctr"/>
+          <a:lstStyle/>
+          <a:p>
+            <a:pPr marL="0" indent="0">
+              <a:buNone/>
+            </a:pPr>
+            <a:r>
+              <a:rPr lang="en-US" sz="1000" dirty="0">
+                <a:solidFill>
+                  <a:srgbClr val="1E293B"/>
+                </a:solidFill>
+                <a:latin typeface="Calibri" pitchFamily="34" charset="0"/>
+                <a:ea typeface="Calibri" pitchFamily="34" charset="-122"/>
+                <a:cs typeface="Calibri" pitchFamily="34" charset="-120"/>
+              </a:rPr>
+              <a:t>Each number shows how strongly two columns move together, on a scale from −1 to +1.</a:t>
+            </a:r>
+            <a:endParaRPr lang="en-US" sz="1000" dirty="0"/>
+          </a:p>
+          <a:p>
+            <a:pPr marL="0" indent="0">
+              <a:buNone/>
+            </a:pPr>
+            <a:endParaRPr lang="en-US" sz="1000" dirty="0"/>
+          </a:p>
+          <a:p>
+            <a:pPr marL="0" indent="0">
+              <a:buNone/>
+            </a:pPr>
+            <a:r>
+              <a:rPr lang="en-US" sz="1000" dirty="0">
+                <a:solidFill>
+                  <a:srgbClr val="1E293B"/>
+                </a:solidFill>
+                <a:latin typeface="Calibri" pitchFamily="34" charset="0"/>
+                <a:ea typeface="Calibri" pitchFamily="34" charset="-122"/>
+                <a:cs typeface="Calibri" pitchFamily="34" charset="-120"/>
+              </a:rPr>
+              <a:t>+1 = move perfectly together  |  −1 = move perfectly opposite  |  0 = no relationship</a:t>
+            </a:r>
+            <a:endParaRPr lang="en-US" sz="1000" dirty="0"/>
+          </a:p>
+        </p:txBody>
+      </p:sp>
+      <p:sp>
+        <p:nvSpPr>
+          <p:cNvPr id="9" name="Shape 6"/>
+          <p:cNvSpPr/>
+          <p:nvPr/>
+        </p:nvSpPr>
+        <p:spPr>
+          <a:xfrm>
+            <a:off x="5532120" y="3228537"/>
+            <a:ext cx="3383280" cy="685800"/>
+          </a:xfrm>
+          <a:prstGeom prst="rect">
+            <a:avLst/>
+          </a:prstGeom>
+          <a:solidFill>
+            <a:srgbClr val="021B2E"/>
+          </a:solidFill>
+          <a:ln w="12700">
+            <a:solidFill>
+              <a:srgbClr val="D6EAF8"/>
+            </a:solidFill>
+            <a:prstDash val="solid"/>
+          </a:ln>
+          <a:effectLst>
+            <a:outerShdw blurRad="101600" dist="38100" dir="8100000" algn="bl" rotWithShape="0">
+              <a:srgbClr val="000000">
+                <a:alpha val="10000"/>
+              </a:srgbClr>
+            </a:outerShdw>
+          </a:effectLst>
+        </p:spPr>
+      </p:sp>
+      <p:sp>
+        <p:nvSpPr>
+          <p:cNvPr id="10" name="Shape 7"/>
+          <p:cNvSpPr/>
+          <p:nvPr/>
+        </p:nvSpPr>
+        <p:spPr>
+          <a:xfrm>
+            <a:off x="5532120" y="3228537"/>
+            <a:ext cx="658368" cy="685800"/>
+          </a:xfrm>
+          <a:prstGeom prst="rect">
+            <a:avLst/>
+          </a:prstGeom>
+          <a:solidFill>
+            <a:srgbClr val="1C7293"/>
+          </a:solidFill>
+          <a:ln w="12700">
+            <a:solidFill>
+              <a:srgbClr val="1C7293"/>
+            </a:solidFill>
+            <a:prstDash val="solid"/>
+          </a:ln>
+        </p:spPr>
+      </p:sp>
+      <p:sp>
+        <p:nvSpPr>
+          <p:cNvPr id="11" name="Text 8"/>
+          <p:cNvSpPr/>
+          <p:nvPr/>
+        </p:nvSpPr>
+        <p:spPr>
+          <a:xfrm>
+            <a:off x="5532120" y="3228537"/>
+            <a:ext cx="658368" cy="594360"/>
+          </a:xfrm>
+          <a:prstGeom prst="rect">
+            <a:avLst/>
+          </a:prstGeom>
+          <a:noFill/>
+          <a:ln/>
+        </p:spPr>
+        <p:txBody>
+          <a:bodyPr wrap="square" lIns="0" tIns="0" rIns="0" bIns="0" rtlCol="0" anchor="ctr"/>
+          <a:lstStyle/>
+          <a:p>
+            <a:pPr marL="0" indent="0" algn="ctr">
+              <a:buNone/>
+            </a:pPr>
+            <a:r>
+              <a:rPr lang="en-US" sz="1200" b="1" dirty="0">
+                <a:solidFill>
+                  <a:srgbClr val="FFFFFF"/>
+                </a:solidFill>
+                <a:latin typeface="Calibri" pitchFamily="34" charset="0"/>
+                <a:ea typeface="Calibri" pitchFamily="34" charset="-122"/>
+                <a:cs typeface="Calibri" pitchFamily="34" charset="-120"/>
+              </a:rPr>
+              <a:t>0.63</a:t>
+            </a:r>
+            <a:endParaRPr lang="en-US" sz="1200" dirty="0"/>
+          </a:p>
+        </p:txBody>
+      </p:sp>
+      <p:sp>
+        <p:nvSpPr>
+          <p:cNvPr id="12" name="Text 9"/>
+          <p:cNvSpPr/>
+          <p:nvPr/>
+        </p:nvSpPr>
+        <p:spPr>
+          <a:xfrm>
+            <a:off x="6263640" y="3265113"/>
+            <a:ext cx="2560320" cy="219456"/>
+          </a:xfrm>
+          <a:prstGeom prst="rect">
+            <a:avLst/>
+          </a:prstGeom>
+          <a:noFill/>
+          <a:ln/>
+        </p:spPr>
+        <p:txBody>
+          <a:bodyPr wrap="square" lIns="0" tIns="0" rIns="0" bIns="0" rtlCol="0" anchor="ctr"/>
+          <a:lstStyle/>
+          <a:p>
+            <a:pPr marL="0" indent="0">
+              <a:buNone/>
+            </a:pPr>
+            <a:r>
+              <a:rPr lang="en-US" sz="1000" b="1" dirty="0">
+                <a:solidFill>
+                  <a:srgbClr val="D6EAF8"/>
+                </a:solidFill>
+                <a:latin typeface="Calibri" pitchFamily="34" charset="0"/>
+                <a:ea typeface="Calibri" pitchFamily="34" charset="-122"/>
+                <a:cs typeface="Calibri" pitchFamily="34" charset="-120"/>
+              </a:rPr>
+              <a:t>Age ↔ Salary</a:t>
+            </a:r>
+            <a:endParaRPr lang="en-US" sz="1000" dirty="0"/>
+          </a:p>
+        </p:txBody>
+      </p:sp>
+      <p:sp>
+        <p:nvSpPr>
+          <p:cNvPr id="13" name="Text 10"/>
+          <p:cNvSpPr/>
+          <p:nvPr/>
+        </p:nvSpPr>
+        <p:spPr>
+          <a:xfrm>
+            <a:off x="6263640" y="3502857"/>
+            <a:ext cx="2560320" cy="274320"/>
+          </a:xfrm>
+          <a:prstGeom prst="rect">
+            <a:avLst/>
+          </a:prstGeom>
+          <a:noFill/>
+          <a:ln/>
+        </p:spPr>
+        <p:txBody>
+          <a:bodyPr wrap="square" lIns="0" tIns="0" rIns="0" bIns="0" rtlCol="0" anchor="ctr"/>
+          <a:lstStyle/>
+          <a:p>
+            <a:pPr marL="0" indent="0">
+              <a:buNone/>
+            </a:pPr>
+            <a:r>
+              <a:rPr lang="en-US" sz="900" dirty="0">
+                <a:solidFill>
+                  <a:srgbClr val="94A3B8"/>
+                </a:solidFill>
+                <a:latin typeface="Calibri" pitchFamily="34" charset="0"/>
+                <a:ea typeface="Calibri" pitchFamily="34" charset="-122"/>
+                <a:cs typeface="Calibri" pitchFamily="34" charset="-120"/>
+              </a:rPr>
+              <a:t>Moderate positive link. Older employees tend to earn more — likely reflecting experience and career progression.</a:t>
+            </a:r>
+            <a:endParaRPr lang="en-US" sz="900" dirty="0"/>
+          </a:p>
+        </p:txBody>
+      </p:sp>
       <p:pic>
         <p:nvPicPr>
-          <p:cNvPr id="5" name="Image 0" descr="/home/claude/fig6_heatmap.png"/>
+          <p:cNvPr id="30" name="Picture 29">
+            <a:extLst>
+              <a:ext uri="{FF2B5EF4-FFF2-40B4-BE49-F238E27FC236}">
+                <a16:creationId xmlns:a16="http://schemas.microsoft.com/office/drawing/2014/main" id="{E0634DAF-2D5C-CBA4-7206-59ACF524B4EF}"/>
+              </a:ext>
+            </a:extLst>
+          </p:cNvPr>
           <p:cNvPicPr>
             <a:picLocks noChangeAspect="1"/>
           </p:cNvPicPr>
@@ -12801,843 +12945,14 @@
         </p:blipFill>
         <p:spPr>
           <a:xfrm>
-            <a:off x="274320" y="914400"/>
-            <a:ext cx="5029200" cy="3977640"/>
+            <a:off x="365760" y="960120"/>
+            <a:ext cx="4799657" cy="4071386"/>
           </a:xfrm>
           <a:prstGeom prst="rect">
             <a:avLst/>
           </a:prstGeom>
         </p:spPr>
       </p:pic>
-      <p:sp>
-        <p:nvSpPr>
-          <p:cNvPr id="6" name="Text 3"/>
-          <p:cNvSpPr/>
-          <p:nvPr/>
-        </p:nvSpPr>
-        <p:spPr>
-          <a:xfrm>
-            <a:off x="5532120" y="960120"/>
-            <a:ext cx="3383280" cy="320040"/>
-          </a:xfrm>
-          <a:prstGeom prst="rect">
-            <a:avLst/>
-          </a:prstGeom>
-          <a:noFill/>
-          <a:ln/>
-        </p:spPr>
-        <p:txBody>
-          <a:bodyPr wrap="square" lIns="0" tIns="0" rIns="0" bIns="0" rtlCol="0" anchor="ctr"/>
-          <a:lstStyle/>
-          <a:p>
-            <a:pPr marL="0" indent="0">
-              <a:buNone/>
-            </a:pPr>
-            <a:r>
-              <a:rPr lang="en-US" sz="1200" b="1" dirty="0">
-                <a:solidFill>
-                  <a:srgbClr val="065A82"/>
-                </a:solidFill>
-                <a:latin typeface="Calibri" pitchFamily="34" charset="0"/>
-                <a:ea typeface="Calibri" pitchFamily="34" charset="-122"/>
-                <a:cs typeface="Calibri" pitchFamily="34" charset="-120"/>
-              </a:rPr>
-              <a:t>How to Read This Chart</a:t>
-            </a:r>
-            <a:endParaRPr lang="en-US" sz="1200" dirty="0"/>
-          </a:p>
-        </p:txBody>
-      </p:sp>
-      <p:sp>
-        <p:nvSpPr>
-          <p:cNvPr id="7" name="Shape 4"/>
-          <p:cNvSpPr/>
-          <p:nvPr/>
-        </p:nvSpPr>
-        <p:spPr>
-          <a:xfrm>
-            <a:off x="5532120" y="1325880"/>
-            <a:ext cx="3383280" cy="1143000"/>
-          </a:xfrm>
-          <a:prstGeom prst="rect">
-            <a:avLst/>
-          </a:prstGeom>
-          <a:solidFill>
-            <a:srgbClr val="F0F7FF"/>
-          </a:solidFill>
-          <a:ln w="12700">
-            <a:solidFill>
-              <a:srgbClr val="D6EAF8"/>
-            </a:solidFill>
-            <a:prstDash val="solid"/>
-          </a:ln>
-          <a:effectLst>
-            <a:outerShdw blurRad="101600" dist="38100" dir="8100000" algn="bl" rotWithShape="0">
-              <a:srgbClr val="000000">
-                <a:alpha val="10000"/>
-              </a:srgbClr>
-            </a:outerShdw>
-          </a:effectLst>
-        </p:spPr>
-      </p:sp>
-      <p:sp>
-        <p:nvSpPr>
-          <p:cNvPr id="8" name="Text 5"/>
-          <p:cNvSpPr/>
-          <p:nvPr/>
-        </p:nvSpPr>
-        <p:spPr>
-          <a:xfrm>
-            <a:off x="5623560" y="1389888"/>
-            <a:ext cx="3200400" cy="1024128"/>
-          </a:xfrm>
-          <a:prstGeom prst="rect">
-            <a:avLst/>
-          </a:prstGeom>
-          <a:noFill/>
-          <a:ln/>
-        </p:spPr>
-        <p:txBody>
-          <a:bodyPr wrap="square" lIns="0" tIns="0" rIns="0" bIns="0" rtlCol="0" anchor="ctr"/>
-          <a:lstStyle/>
-          <a:p>
-            <a:pPr marL="0" indent="0">
-              <a:buNone/>
-            </a:pPr>
-            <a:r>
-              <a:rPr lang="en-US" sz="1000" dirty="0">
-                <a:solidFill>
-                  <a:srgbClr val="1E293B"/>
-                </a:solidFill>
-                <a:latin typeface="Calibri" pitchFamily="34" charset="0"/>
-                <a:ea typeface="Calibri" pitchFamily="34" charset="-122"/>
-                <a:cs typeface="Calibri" pitchFamily="34" charset="-120"/>
-              </a:rPr>
-              <a:t>Each number shows how strongly two columns move together, on a scale from −1 to +1.</a:t>
-            </a:r>
-            <a:endParaRPr lang="en-US" sz="1000" dirty="0"/>
-          </a:p>
-          <a:p>
-            <a:pPr marL="0" indent="0">
-              <a:buNone/>
-            </a:pPr>
-            <a:endParaRPr lang="en-US" sz="1000" dirty="0"/>
-          </a:p>
-          <a:p>
-            <a:pPr marL="0" indent="0">
-              <a:buNone/>
-            </a:pPr>
-            <a:r>
-              <a:rPr lang="en-US" sz="1000" dirty="0">
-                <a:solidFill>
-                  <a:srgbClr val="1E293B"/>
-                </a:solidFill>
-                <a:latin typeface="Calibri" pitchFamily="34" charset="0"/>
-                <a:ea typeface="Calibri" pitchFamily="34" charset="-122"/>
-                <a:cs typeface="Calibri" pitchFamily="34" charset="-120"/>
-              </a:rPr>
-              <a:t>+1 = move perfectly together  |  −1 = move perfectly opposite  |  0 = no relationship</a:t>
-            </a:r>
-            <a:endParaRPr lang="en-US" sz="1000" dirty="0"/>
-          </a:p>
-        </p:txBody>
-      </p:sp>
-      <p:sp>
-        <p:nvSpPr>
-          <p:cNvPr id="9" name="Shape 6"/>
-          <p:cNvSpPr/>
-          <p:nvPr/>
-        </p:nvSpPr>
-        <p:spPr>
-          <a:xfrm>
-            <a:off x="5532120" y="2560320"/>
-            <a:ext cx="3383280" cy="594360"/>
-          </a:xfrm>
-          <a:prstGeom prst="rect">
-            <a:avLst/>
-          </a:prstGeom>
-          <a:solidFill>
-            <a:srgbClr val="021B2E"/>
-          </a:solidFill>
-          <a:ln w="12700">
-            <a:solidFill>
-              <a:srgbClr val="D6EAF8"/>
-            </a:solidFill>
-            <a:prstDash val="solid"/>
-          </a:ln>
-          <a:effectLst>
-            <a:outerShdw blurRad="101600" dist="38100" dir="8100000" algn="bl" rotWithShape="0">
-              <a:srgbClr val="000000">
-                <a:alpha val="10000"/>
-              </a:srgbClr>
-            </a:outerShdw>
-          </a:effectLst>
-        </p:spPr>
-      </p:sp>
-      <p:sp>
-        <p:nvSpPr>
-          <p:cNvPr id="10" name="Shape 7"/>
-          <p:cNvSpPr/>
-          <p:nvPr/>
-        </p:nvSpPr>
-        <p:spPr>
-          <a:xfrm>
-            <a:off x="5532120" y="2560320"/>
-            <a:ext cx="658368" cy="594360"/>
-          </a:xfrm>
-          <a:prstGeom prst="rect">
-            <a:avLst/>
-          </a:prstGeom>
-          <a:solidFill>
-            <a:srgbClr val="1C7293"/>
-          </a:solidFill>
-          <a:ln w="12700">
-            <a:solidFill>
-              <a:srgbClr val="1C7293"/>
-            </a:solidFill>
-            <a:prstDash val="solid"/>
-          </a:ln>
-        </p:spPr>
-      </p:sp>
-      <p:sp>
-        <p:nvSpPr>
-          <p:cNvPr id="11" name="Text 8"/>
-          <p:cNvSpPr/>
-          <p:nvPr/>
-        </p:nvSpPr>
-        <p:spPr>
-          <a:xfrm>
-            <a:off x="5532120" y="2560320"/>
-            <a:ext cx="658368" cy="594360"/>
-          </a:xfrm>
-          <a:prstGeom prst="rect">
-            <a:avLst/>
-          </a:prstGeom>
-          <a:noFill/>
-          <a:ln/>
-        </p:spPr>
-        <p:txBody>
-          <a:bodyPr wrap="square" lIns="0" tIns="0" rIns="0" bIns="0" rtlCol="0" anchor="ctr"/>
-          <a:lstStyle/>
-          <a:p>
-            <a:pPr marL="0" indent="0" algn="ctr">
-              <a:buNone/>
-            </a:pPr>
-            <a:r>
-              <a:rPr lang="en-US" sz="1200" b="1" dirty="0">
-                <a:solidFill>
-                  <a:srgbClr val="FFFFFF"/>
-                </a:solidFill>
-                <a:latin typeface="Calibri" pitchFamily="34" charset="0"/>
-                <a:ea typeface="Calibri" pitchFamily="34" charset="-122"/>
-                <a:cs typeface="Calibri" pitchFamily="34" charset="-120"/>
-              </a:rPr>
-              <a:t>0.63</a:t>
-            </a:r>
-            <a:endParaRPr lang="en-US" sz="1200" dirty="0"/>
-          </a:p>
-        </p:txBody>
-      </p:sp>
-      <p:sp>
-        <p:nvSpPr>
-          <p:cNvPr id="12" name="Text 9"/>
-          <p:cNvSpPr/>
-          <p:nvPr/>
-        </p:nvSpPr>
-        <p:spPr>
-          <a:xfrm>
-            <a:off x="6263640" y="2596896"/>
-            <a:ext cx="2560320" cy="219456"/>
-          </a:xfrm>
-          <a:prstGeom prst="rect">
-            <a:avLst/>
-          </a:prstGeom>
-          <a:noFill/>
-          <a:ln/>
-        </p:spPr>
-        <p:txBody>
-          <a:bodyPr wrap="square" lIns="0" tIns="0" rIns="0" bIns="0" rtlCol="0" anchor="ctr"/>
-          <a:lstStyle/>
-          <a:p>
-            <a:pPr marL="0" indent="0">
-              <a:buNone/>
-            </a:pPr>
-            <a:r>
-              <a:rPr lang="en-US" sz="1000" b="1" dirty="0">
-                <a:solidFill>
-                  <a:srgbClr val="D6EAF8"/>
-                </a:solidFill>
-                <a:latin typeface="Calibri" pitchFamily="34" charset="0"/>
-                <a:ea typeface="Calibri" pitchFamily="34" charset="-122"/>
-                <a:cs typeface="Calibri" pitchFamily="34" charset="-120"/>
-              </a:rPr>
-              <a:t>Age ↔ Salary</a:t>
-            </a:r>
-            <a:endParaRPr lang="en-US" sz="1000" dirty="0"/>
-          </a:p>
-        </p:txBody>
-      </p:sp>
-      <p:sp>
-        <p:nvSpPr>
-          <p:cNvPr id="13" name="Text 10"/>
-          <p:cNvSpPr/>
-          <p:nvPr/>
-        </p:nvSpPr>
-        <p:spPr>
-          <a:xfrm>
-            <a:off x="6263640" y="2834640"/>
-            <a:ext cx="2560320" cy="274320"/>
-          </a:xfrm>
-          <a:prstGeom prst="rect">
-            <a:avLst/>
-          </a:prstGeom>
-          <a:noFill/>
-          <a:ln/>
-        </p:spPr>
-        <p:txBody>
-          <a:bodyPr wrap="square" lIns="0" tIns="0" rIns="0" bIns="0" rtlCol="0" anchor="ctr"/>
-          <a:lstStyle/>
-          <a:p>
-            <a:pPr marL="0" indent="0">
-              <a:buNone/>
-            </a:pPr>
-            <a:r>
-              <a:rPr lang="en-US" sz="900" dirty="0">
-                <a:solidFill>
-                  <a:srgbClr val="94A3B8"/>
-                </a:solidFill>
-                <a:latin typeface="Calibri" pitchFamily="34" charset="0"/>
-                <a:ea typeface="Calibri" pitchFamily="34" charset="-122"/>
-                <a:cs typeface="Calibri" pitchFamily="34" charset="-120"/>
-              </a:rPr>
-              <a:t>Moderate positive link. Older employees tend to earn more — likely reflecting experience and career progression.</a:t>
-            </a:r>
-            <a:endParaRPr lang="en-US" sz="900" dirty="0"/>
-          </a:p>
-        </p:txBody>
-      </p:sp>
-      <p:sp>
-        <p:nvSpPr>
-          <p:cNvPr id="14" name="Shape 11"/>
-          <p:cNvSpPr/>
-          <p:nvPr/>
-        </p:nvSpPr>
-        <p:spPr>
-          <a:xfrm>
-            <a:off x="5532120" y="3227832"/>
-            <a:ext cx="3383280" cy="594360"/>
-          </a:xfrm>
-          <a:prstGeom prst="rect">
-            <a:avLst/>
-          </a:prstGeom>
-          <a:solidFill>
-            <a:srgbClr val="021B2E"/>
-          </a:solidFill>
-          <a:ln w="12700">
-            <a:solidFill>
-              <a:srgbClr val="D6EAF8"/>
-            </a:solidFill>
-            <a:prstDash val="solid"/>
-          </a:ln>
-          <a:effectLst>
-            <a:outerShdw blurRad="101600" dist="38100" dir="8100000" algn="bl" rotWithShape="0">
-              <a:srgbClr val="000000">
-                <a:alpha val="10000"/>
-              </a:srgbClr>
-            </a:outerShdw>
-          </a:effectLst>
-        </p:spPr>
-      </p:sp>
-      <p:sp>
-        <p:nvSpPr>
-          <p:cNvPr id="15" name="Shape 12"/>
-          <p:cNvSpPr/>
-          <p:nvPr/>
-        </p:nvSpPr>
-        <p:spPr>
-          <a:xfrm>
-            <a:off x="5532120" y="3227832"/>
-            <a:ext cx="658368" cy="594360"/>
-          </a:xfrm>
-          <a:prstGeom prst="rect">
-            <a:avLst/>
-          </a:prstGeom>
-          <a:solidFill>
-            <a:srgbClr val="1C7293"/>
-          </a:solidFill>
-          <a:ln w="12700">
-            <a:solidFill>
-              <a:srgbClr val="1C7293"/>
-            </a:solidFill>
-            <a:prstDash val="solid"/>
-          </a:ln>
-        </p:spPr>
-      </p:sp>
-      <p:sp>
-        <p:nvSpPr>
-          <p:cNvPr id="16" name="Text 13"/>
-          <p:cNvSpPr/>
-          <p:nvPr/>
-        </p:nvSpPr>
-        <p:spPr>
-          <a:xfrm>
-            <a:off x="5532120" y="3227832"/>
-            <a:ext cx="658368" cy="594360"/>
-          </a:xfrm>
-          <a:prstGeom prst="rect">
-            <a:avLst/>
-          </a:prstGeom>
-          <a:noFill/>
-          <a:ln/>
-        </p:spPr>
-        <p:txBody>
-          <a:bodyPr wrap="square" lIns="0" tIns="0" rIns="0" bIns="0" rtlCol="0" anchor="ctr"/>
-          <a:lstStyle/>
-          <a:p>
-            <a:pPr marL="0" indent="0" algn="ctr">
-              <a:buNone/>
-            </a:pPr>
-            <a:r>
-              <a:rPr lang="en-US" sz="1200" b="1" dirty="0">
-                <a:solidFill>
-                  <a:srgbClr val="FFFFFF"/>
-                </a:solidFill>
-                <a:latin typeface="Calibri" pitchFamily="34" charset="0"/>
-                <a:ea typeface="Calibri" pitchFamily="34" charset="-122"/>
-                <a:cs typeface="Calibri" pitchFamily="34" charset="-120"/>
-              </a:rPr>
-              <a:t>−0.64</a:t>
-            </a:r>
-            <a:endParaRPr lang="en-US" sz="1200" dirty="0"/>
-          </a:p>
-        </p:txBody>
-      </p:sp>
-      <p:sp>
-        <p:nvSpPr>
-          <p:cNvPr id="17" name="Text 14"/>
-          <p:cNvSpPr/>
-          <p:nvPr/>
-        </p:nvSpPr>
-        <p:spPr>
-          <a:xfrm>
-            <a:off x="6263640" y="3264408"/>
-            <a:ext cx="2560320" cy="219456"/>
-          </a:xfrm>
-          <a:prstGeom prst="rect">
-            <a:avLst/>
-          </a:prstGeom>
-          <a:noFill/>
-          <a:ln/>
-        </p:spPr>
-        <p:txBody>
-          <a:bodyPr wrap="square" lIns="0" tIns="0" rIns="0" bIns="0" rtlCol="0" anchor="ctr"/>
-          <a:lstStyle/>
-          <a:p>
-            <a:pPr marL="0" indent="0">
-              <a:buNone/>
-            </a:pPr>
-            <a:r>
-              <a:rPr lang="en-US" sz="1000" b="1" dirty="0">
-                <a:solidFill>
-                  <a:srgbClr val="D6EAF8"/>
-                </a:solidFill>
-                <a:latin typeface="Calibri" pitchFamily="34" charset="0"/>
-                <a:ea typeface="Calibri" pitchFamily="34" charset="-122"/>
-                <a:cs typeface="Calibri" pitchFamily="34" charset="-120"/>
-              </a:rPr>
-              <a:t>Age ↔ Join Year</a:t>
-            </a:r>
-            <a:endParaRPr lang="en-US" sz="1000" dirty="0"/>
-          </a:p>
-        </p:txBody>
-      </p:sp>
-      <p:sp>
-        <p:nvSpPr>
-          <p:cNvPr id="18" name="Text 15"/>
-          <p:cNvSpPr/>
-          <p:nvPr/>
-        </p:nvSpPr>
-        <p:spPr>
-          <a:xfrm>
-            <a:off x="6263640" y="3502152"/>
-            <a:ext cx="2560320" cy="274320"/>
-          </a:xfrm>
-          <a:prstGeom prst="rect">
-            <a:avLst/>
-          </a:prstGeom>
-          <a:noFill/>
-          <a:ln/>
-        </p:spPr>
-        <p:txBody>
-          <a:bodyPr wrap="square" lIns="0" tIns="0" rIns="0" bIns="0" rtlCol="0" anchor="ctr"/>
-          <a:lstStyle/>
-          <a:p>
-            <a:pPr marL="0" indent="0">
-              <a:buNone/>
-            </a:pPr>
-            <a:r>
-              <a:rPr lang="en-US" sz="900" dirty="0">
-                <a:solidFill>
-                  <a:srgbClr val="94A3B8"/>
-                </a:solidFill>
-                <a:latin typeface="Calibri" pitchFamily="34" charset="0"/>
-                <a:ea typeface="Calibri" pitchFamily="34" charset="-122"/>
-                <a:cs typeface="Calibri" pitchFamily="34" charset="-120"/>
-              </a:rPr>
-              <a:t>Older employees joined earlier (lower year number). This is natural — they've been in the workforce longer.</a:t>
-            </a:r>
-            <a:endParaRPr lang="en-US" sz="900" dirty="0"/>
-          </a:p>
-        </p:txBody>
-      </p:sp>
-      <p:sp>
-        <p:nvSpPr>
-          <p:cNvPr id="19" name="Shape 16"/>
-          <p:cNvSpPr/>
-          <p:nvPr/>
-        </p:nvSpPr>
-        <p:spPr>
-          <a:xfrm>
-            <a:off x="5532120" y="3895344"/>
-            <a:ext cx="3383280" cy="594360"/>
-          </a:xfrm>
-          <a:prstGeom prst="rect">
-            <a:avLst/>
-          </a:prstGeom>
-          <a:solidFill>
-            <a:srgbClr val="F0F7FF"/>
-          </a:solidFill>
-          <a:ln w="12700">
-            <a:solidFill>
-              <a:srgbClr val="D6EAF8"/>
-            </a:solidFill>
-            <a:prstDash val="solid"/>
-          </a:ln>
-          <a:effectLst>
-            <a:outerShdw blurRad="101600" dist="38100" dir="8100000" algn="bl" rotWithShape="0">
-              <a:srgbClr val="000000">
-                <a:alpha val="10000"/>
-              </a:srgbClr>
-            </a:outerShdw>
-          </a:effectLst>
-        </p:spPr>
-      </p:sp>
-      <p:sp>
-        <p:nvSpPr>
-          <p:cNvPr id="20" name="Shape 17"/>
-          <p:cNvSpPr/>
-          <p:nvPr/>
-        </p:nvSpPr>
-        <p:spPr>
-          <a:xfrm>
-            <a:off x="5532120" y="3895344"/>
-            <a:ext cx="658368" cy="594360"/>
-          </a:xfrm>
-          <a:prstGeom prst="rect">
-            <a:avLst/>
-          </a:prstGeom>
-          <a:solidFill>
-            <a:srgbClr val="1C7293"/>
-          </a:solidFill>
-          <a:ln w="12700">
-            <a:solidFill>
-              <a:srgbClr val="1C7293"/>
-            </a:solidFill>
-            <a:prstDash val="solid"/>
-          </a:ln>
-        </p:spPr>
-      </p:sp>
-      <p:sp>
-        <p:nvSpPr>
-          <p:cNvPr id="21" name="Text 18"/>
-          <p:cNvSpPr/>
-          <p:nvPr/>
-        </p:nvSpPr>
-        <p:spPr>
-          <a:xfrm>
-            <a:off x="5532120" y="3895344"/>
-            <a:ext cx="658368" cy="594360"/>
-          </a:xfrm>
-          <a:prstGeom prst="rect">
-            <a:avLst/>
-          </a:prstGeom>
-          <a:noFill/>
-          <a:ln/>
-        </p:spPr>
-        <p:txBody>
-          <a:bodyPr wrap="square" lIns="0" tIns="0" rIns="0" bIns="0" rtlCol="0" anchor="ctr"/>
-          <a:lstStyle/>
-          <a:p>
-            <a:pPr marL="0" indent="0" algn="ctr">
-              <a:buNone/>
-            </a:pPr>
-            <a:r>
-              <a:rPr lang="en-US" sz="1200" b="1" dirty="0">
-                <a:solidFill>
-                  <a:srgbClr val="FFFFFF"/>
-                </a:solidFill>
-                <a:latin typeface="Calibri" pitchFamily="34" charset="0"/>
-                <a:ea typeface="Calibri" pitchFamily="34" charset="-122"/>
-                <a:cs typeface="Calibri" pitchFamily="34" charset="-120"/>
-              </a:rPr>
-              <a:t>−0.25</a:t>
-            </a:r>
-            <a:endParaRPr lang="en-US" sz="1200" dirty="0"/>
-          </a:p>
-        </p:txBody>
-      </p:sp>
-      <p:sp>
-        <p:nvSpPr>
-          <p:cNvPr id="22" name="Text 19"/>
-          <p:cNvSpPr/>
-          <p:nvPr/>
-        </p:nvSpPr>
-        <p:spPr>
-          <a:xfrm>
-            <a:off x="6263640" y="3931920"/>
-            <a:ext cx="2560320" cy="118872"/>
-          </a:xfrm>
-          <a:prstGeom prst="rect">
-            <a:avLst/>
-          </a:prstGeom>
-          <a:noFill/>
-          <a:ln/>
-        </p:spPr>
-        <p:txBody>
-          <a:bodyPr wrap="square" lIns="0" tIns="0" rIns="0" bIns="0" rtlCol="0" anchor="ctr"/>
-          <a:lstStyle/>
-          <a:p>
-            <a:pPr marL="0" indent="0">
-              <a:buNone/>
-            </a:pPr>
-            <a:r>
-              <a:rPr lang="en-US" sz="1000" b="1" dirty="0">
-                <a:solidFill>
-                  <a:srgbClr val="065A82"/>
-                </a:solidFill>
-                <a:latin typeface="Calibri" pitchFamily="34" charset="0"/>
-                <a:ea typeface="Calibri" pitchFamily="34" charset="-122"/>
-                <a:cs typeface="Calibri" pitchFamily="34" charset="-120"/>
-              </a:rPr>
-              <a:t>Country ↔ Salary</a:t>
-            </a:r>
-            <a:endParaRPr lang="en-US" sz="1000" dirty="0"/>
-          </a:p>
-        </p:txBody>
-      </p:sp>
-      <p:sp>
-        <p:nvSpPr>
-          <p:cNvPr id="23" name="Text 20"/>
-          <p:cNvSpPr/>
-          <p:nvPr/>
-        </p:nvSpPr>
-        <p:spPr>
-          <a:xfrm>
-            <a:off x="6263640" y="4114800"/>
-            <a:ext cx="2560320" cy="274320"/>
-          </a:xfrm>
-          <a:prstGeom prst="rect">
-            <a:avLst/>
-          </a:prstGeom>
-          <a:noFill/>
-          <a:ln/>
-        </p:spPr>
-        <p:txBody>
-          <a:bodyPr wrap="square" lIns="0" tIns="0" rIns="0" bIns="0" rtlCol="0" anchor="ctr"/>
-          <a:lstStyle/>
-          <a:p>
-            <a:pPr marL="0" indent="0">
-              <a:buNone/>
-            </a:pPr>
-            <a:r>
-              <a:rPr lang="en-US" sz="900" dirty="0">
-                <a:solidFill>
-                  <a:srgbClr val="1E293B"/>
-                </a:solidFill>
-                <a:latin typeface="Calibri" pitchFamily="34" charset="0"/>
-                <a:ea typeface="Calibri" pitchFamily="34" charset="-122"/>
-                <a:cs typeface="Calibri" pitchFamily="34" charset="-120"/>
-              </a:rPr>
-              <a:t>Weak negative link. AUS employees earn slightly more on average than NZ employees, but the relationship is not strong.</a:t>
-            </a:r>
-            <a:endParaRPr lang="en-US" sz="900" dirty="0"/>
-          </a:p>
-        </p:txBody>
-      </p:sp>
-      <p:sp>
-        <p:nvSpPr>
-          <p:cNvPr id="24" name="Shape 21"/>
-          <p:cNvSpPr/>
-          <p:nvPr/>
-        </p:nvSpPr>
-        <p:spPr>
-          <a:xfrm>
-            <a:off x="5532120" y="4562856"/>
-            <a:ext cx="3383280" cy="594360"/>
-          </a:xfrm>
-          <a:prstGeom prst="rect">
-            <a:avLst/>
-          </a:prstGeom>
-          <a:solidFill>
-            <a:srgbClr val="F0F7FF"/>
-          </a:solidFill>
-          <a:ln w="12700">
-            <a:solidFill>
-              <a:srgbClr val="D6EAF8"/>
-            </a:solidFill>
-            <a:prstDash val="solid"/>
-          </a:ln>
-          <a:effectLst>
-            <a:outerShdw blurRad="101600" dist="38100" dir="8100000" algn="bl" rotWithShape="0">
-              <a:srgbClr val="000000">
-                <a:alpha val="10000"/>
-              </a:srgbClr>
-            </a:outerShdw>
-          </a:effectLst>
-        </p:spPr>
-      </p:sp>
-      <p:sp>
-        <p:nvSpPr>
-          <p:cNvPr id="25" name="Shape 22"/>
-          <p:cNvSpPr/>
-          <p:nvPr/>
-        </p:nvSpPr>
-        <p:spPr>
-          <a:xfrm>
-            <a:off x="5532120" y="4562856"/>
-            <a:ext cx="658368" cy="594360"/>
-          </a:xfrm>
-          <a:prstGeom prst="rect">
-            <a:avLst/>
-          </a:prstGeom>
-          <a:solidFill>
-            <a:srgbClr val="1C7293"/>
-          </a:solidFill>
-          <a:ln w="12700">
-            <a:solidFill>
-              <a:srgbClr val="1C7293"/>
-            </a:solidFill>
-            <a:prstDash val="solid"/>
-          </a:ln>
-        </p:spPr>
-      </p:sp>
-      <p:sp>
-        <p:nvSpPr>
-          <p:cNvPr id="26" name="Text 23"/>
-          <p:cNvSpPr/>
-          <p:nvPr/>
-        </p:nvSpPr>
-        <p:spPr>
-          <a:xfrm>
-            <a:off x="5532120" y="4562856"/>
-            <a:ext cx="658368" cy="594360"/>
-          </a:xfrm>
-          <a:prstGeom prst="rect">
-            <a:avLst/>
-          </a:prstGeom>
-          <a:noFill/>
-          <a:ln/>
-        </p:spPr>
-        <p:txBody>
-          <a:bodyPr wrap="square" lIns="0" tIns="0" rIns="0" bIns="0" rtlCol="0" anchor="ctr"/>
-          <a:lstStyle/>
-          <a:p>
-            <a:pPr marL="0" indent="0" algn="ctr">
-              <a:buNone/>
-            </a:pPr>
-            <a:r>
-              <a:rPr lang="en-US" sz="1200" b="1" dirty="0">
-                <a:solidFill>
-                  <a:srgbClr val="FFFFFF"/>
-                </a:solidFill>
-                <a:latin typeface="Calibri" pitchFamily="34" charset="0"/>
-                <a:ea typeface="Calibri" pitchFamily="34" charset="-122"/>
-                <a:cs typeface="Calibri" pitchFamily="34" charset="-120"/>
-              </a:rPr>
-              <a:t>−0.03</a:t>
-            </a:r>
-            <a:endParaRPr lang="en-US" sz="1200" dirty="0"/>
-          </a:p>
-        </p:txBody>
-      </p:sp>
-      <p:sp>
-        <p:nvSpPr>
-          <p:cNvPr id="27" name="Text 24"/>
-          <p:cNvSpPr/>
-          <p:nvPr/>
-        </p:nvSpPr>
-        <p:spPr>
-          <a:xfrm>
-            <a:off x="6263640" y="4518543"/>
-            <a:ext cx="2560320" cy="219456"/>
-          </a:xfrm>
-          <a:prstGeom prst="rect">
-            <a:avLst/>
-          </a:prstGeom>
-          <a:noFill/>
-          <a:ln/>
-        </p:spPr>
-        <p:txBody>
-          <a:bodyPr wrap="square" lIns="0" tIns="0" rIns="0" bIns="0" rtlCol="0" anchor="ctr"/>
-          <a:lstStyle/>
-          <a:p>
-            <a:pPr marL="0" indent="0">
-              <a:buNone/>
-            </a:pPr>
-            <a:r>
-              <a:rPr lang="en-US" sz="1000" b="1" dirty="0">
-                <a:solidFill>
-                  <a:srgbClr val="065A82"/>
-                </a:solidFill>
-                <a:latin typeface="Calibri" pitchFamily="34" charset="0"/>
-                <a:ea typeface="Calibri" pitchFamily="34" charset="-122"/>
-                <a:cs typeface="Calibri" pitchFamily="34" charset="-120"/>
-              </a:rPr>
-              <a:t>Salary ↔ Join Year</a:t>
-            </a:r>
-            <a:endParaRPr lang="en-US" sz="1000" dirty="0"/>
-          </a:p>
-        </p:txBody>
-      </p:sp>
-      <p:sp>
-        <p:nvSpPr>
-          <p:cNvPr id="28" name="Text 25"/>
-          <p:cNvSpPr/>
-          <p:nvPr/>
-        </p:nvSpPr>
-        <p:spPr>
-          <a:xfrm>
-            <a:off x="6263640" y="4782312"/>
-            <a:ext cx="2560320" cy="274320"/>
-          </a:xfrm>
-          <a:prstGeom prst="rect">
-            <a:avLst/>
-          </a:prstGeom>
-          <a:noFill/>
-          <a:ln/>
-        </p:spPr>
-        <p:txBody>
-          <a:bodyPr wrap="square" lIns="0" tIns="0" rIns="0" bIns="0" rtlCol="0" anchor="ctr"/>
-          <a:lstStyle/>
-          <a:p>
-            <a:pPr marL="0" indent="0">
-              <a:buNone/>
-            </a:pPr>
-            <a:r>
-              <a:rPr lang="en-US" sz="900" dirty="0">
-                <a:solidFill>
-                  <a:srgbClr val="1E293B"/>
-                </a:solidFill>
-                <a:latin typeface="Calibri" pitchFamily="34" charset="0"/>
-                <a:ea typeface="Calibri" pitchFamily="34" charset="-122"/>
-                <a:cs typeface="Calibri" pitchFamily="34" charset="-120"/>
-              </a:rPr>
-              <a:t>Almost zero. When someone joined has virtually no bearing on what they earn — pay is driven by other factors.</a:t>
-            </a:r>
-            <a:endParaRPr lang="en-US" sz="900" dirty="0"/>
-          </a:p>
-        </p:txBody>
-      </p:sp>
     </p:spTree>
   </p:cSld>
   <p:clrMapOvr>
